--- a/uploads/pdf/formation-equipe-exemple.pptx
+++ b/uploads/pdf/formation-equipe-exemple.pptx
@@ -3550,7 +3550,7 @@
           <a:lstStyle/>
           <a:p>
             <a:r>
-              <a:t>Module 1 — Les fondamentaux du management de proximité</a:t>
+              <a:t>Module 1 · les fondamentaux du management de proximité</a:t>
             </a:r>
           </a:p>
         </p:txBody>
